--- a/public/fun/cards/expert/expert-44.pptx
+++ b/public/fun/cards/expert/expert-44.pptx
@@ -3085,7 +3085,7 @@
     <p:bg>
       <p:bgPr>
         <a:solidFill>
-          <a:srgbClr val="FBF8F2"/>
+          <a:srgbClr val="F3F4F6"/>
         </a:solidFill>
         <a:effectLst/>
       </p:bgPr>
@@ -3099,38 +3099,20 @@
       <p:grpSpPr/>
       <p:sp>
         <p:nvSpPr>
-          <p:cNvPr id="2" name="Freeform 1"/>
+          <p:cNvPr id="2" name="Rectangle 1"/>
           <p:cNvSpPr/>
           <p:nvPr/>
         </p:nvSpPr>
         <p:spPr>
           <a:xfrm>
-            <a:off x="1944000" y="540000"/>
-            <a:ext cx="1296000" cy="1260000"/>
-          </a:xfrm>
-          <a:custGeom>
+            <a:off x="252000" y="144000"/>
+            <a:ext cx="201600" cy="21600"/>
+          </a:xfrm>
+          <a:prstGeom prst="rect">
             <a:avLst/>
-            <a:gdLst/>
-            <a:ahLst/>
-            <a:cxnLst/>
-            <a:rect l="l" t="t" r="r" b="b"/>
-            <a:pathLst>
-              <a:path w="1296000" h="1260000">
-                <a:moveTo>
-                  <a:pt x="1296000" y="1260000"/>
-                </a:moveTo>
-                <a:lnTo>
-                  <a:pt x="1296000" y="0"/>
-                </a:lnTo>
-                <a:lnTo>
-                  <a:pt x="0" y="1260000"/>
-                </a:lnTo>
-                <a:close/>
-              </a:path>
-            </a:pathLst>
-          </a:custGeom>
+          </a:prstGeom>
           <a:solidFill>
-            <a:srgbClr val="913B83"/>
+            <a:srgbClr val="F0262F"/>
           </a:solidFill>
           <a:ln>
             <a:noFill/>
@@ -3146,95 +3128,124 @@
       </p:sp>
       <p:sp>
         <p:nvSpPr>
-          <p:cNvPr id="3" name="Freeform 2"/>
-          <p:cNvSpPr/>
+          <p:cNvPr id="3" name="텍스트"/>
+          <p:cNvSpPr txBox="1"/>
           <p:nvPr/>
         </p:nvSpPr>
         <p:spPr>
           <a:xfrm>
-            <a:off x="2520000" y="1080000"/>
-            <a:ext cx="720000" cy="720000"/>
-          </a:xfrm>
-          <a:custGeom>
-            <a:avLst/>
-            <a:gdLst/>
-            <a:ahLst/>
-            <a:cxnLst/>
-            <a:rect l="l" t="t" r="r" b="b"/>
-            <a:pathLst>
-              <a:path w="720000" h="720000">
-                <a:moveTo>
-                  <a:pt x="720000" y="720000"/>
-                </a:moveTo>
-                <a:lnTo>
-                  <a:pt x="720000" y="0"/>
-                </a:lnTo>
-                <a:lnTo>
-                  <a:pt x="0" y="720000"/>
-                </a:lnTo>
-                <a:close/>
-              </a:path>
-            </a:pathLst>
-          </a:custGeom>
-          <a:solidFill>
-            <a:srgbClr val="E0C8DC">
-              <a:alpha val="90000"/>
-            </a:srgbClr>
-          </a:solidFill>
-          <a:ln>
-            <a:noFill/>
-          </a:ln>
-        </p:spPr>
-        <p:txBody>
-          <a:bodyPr rtlCol="0" anchor="ctr"/>
-          <a:lstStyle/>
-          <a:p>
-            <a:pPr algn="ctr"/>
-          </a:p>
-        </p:txBody>
-      </p:sp>
-      <p:cxnSp>
-        <p:nvCxnSpPr>
-          <p:cNvPr id="4" name="Connector 3"/>
-          <p:cNvCxnSpPr/>
-          <p:nvPr/>
-        </p:nvCxnSpPr>
-        <p:spPr>
-          <a:xfrm flipH="1">
-            <a:off x="2845440" y="1406736"/>
-            <a:ext cx="69264" cy="69264"/>
-          </a:xfrm>
-          <a:prstGeom prst="line">
+            <a:off x="252000" y="273600"/>
+            <a:ext cx="2160000" cy="360000"/>
+          </a:xfrm>
+          <a:prstGeom prst="rect">
             <a:avLst/>
           </a:prstGeom>
-          <a:ln w="21312">
-            <a:solidFill>
-              <a:srgbClr val="FFFFFF"/>
-            </a:solidFill>
-          </a:ln>
-        </p:spPr>
-      </p:cxnSp>
-      <p:cxnSp>
-        <p:nvCxnSpPr>
-          <p:cNvPr id="5" name="Connector 4"/>
-          <p:cNvCxnSpPr/>
+          <a:noFill/>
+        </p:spPr>
+        <p:txBody>
+          <a:bodyPr wrap="square" lIns="0" rIns="0" tIns="0" bIns="0" anchor="t">
+            <a:spAutoFit/>
+          </a:bodyPr>
+          <a:lstStyle/>
+          <a:p>
+            <a:pPr algn="l">
+              <a:lnSpc>
+                <a:spcPts val="3190"/>
+              </a:lnSpc>
+            </a:pPr>
+            <a:r>
+              <a:rPr sz="2200" b="1">
+                <a:solidFill>
+                  <a:srgbClr val="12151C"/>
+                </a:solidFill>
+                <a:latin typeface="맑은 고딕"/>
+                <a:ea typeface="맑은 고딕"/>
+              </a:rPr>
+              <a:t>연주혁</a:t>
+            </a:r>
+          </a:p>
+        </p:txBody>
+      </p:sp>
+      <p:sp>
+        <p:nvSpPr>
+          <p:cNvPr id="4" name="텍스트"/>
+          <p:cNvSpPr txBox="1"/>
           <p:nvPr/>
-        </p:nvCxnSpPr>
-        <p:spPr>
-          <a:xfrm>
-            <a:off x="2845440" y="1476000"/>
-            <a:ext cx="69264" cy="69264"/>
-          </a:xfrm>
-          <a:prstGeom prst="line">
+        </p:nvSpPr>
+        <p:spPr>
+          <a:xfrm>
+            <a:off x="252000" y="676800"/>
+            <a:ext cx="2160000" cy="171451"/>
+          </a:xfrm>
+          <a:prstGeom prst="rect">
             <a:avLst/>
           </a:prstGeom>
-          <a:ln w="21312">
-            <a:solidFill>
-              <a:srgbClr val="FFFFFF"/>
-            </a:solidFill>
-          </a:ln>
-        </p:spPr>
-      </p:cxnSp>
+          <a:noFill/>
+        </p:spPr>
+        <p:txBody>
+          <a:bodyPr wrap="square" lIns="0" rIns="0" tIns="0" bIns="0" anchor="t">
+            <a:spAutoFit/>
+          </a:bodyPr>
+          <a:lstStyle/>
+          <a:p>
+            <a:pPr algn="l">
+              <a:lnSpc>
+                <a:spcPts val="1305"/>
+              </a:lnSpc>
+            </a:pPr>
+            <a:r>
+              <a:rPr sz="900" b="0">
+                <a:solidFill>
+                  <a:srgbClr val="6B7280"/>
+                </a:solidFill>
+                <a:latin typeface="맑은 고딕"/>
+                <a:ea typeface="맑은 고딕"/>
+              </a:rPr>
+              <a:t>경영 컨설턴트</a:t>
+            </a:r>
+          </a:p>
+        </p:txBody>
+      </p:sp>
+      <p:sp>
+        <p:nvSpPr>
+          <p:cNvPr id="5" name="텍스트"/>
+          <p:cNvSpPr txBox="1"/>
+          <p:nvPr/>
+        </p:nvSpPr>
+        <p:spPr>
+          <a:xfrm>
+            <a:off x="1548000" y="230400"/>
+            <a:ext cx="1440000" cy="123826"/>
+          </a:xfrm>
+          <a:prstGeom prst="rect">
+            <a:avLst/>
+          </a:prstGeom>
+          <a:noFill/>
+        </p:spPr>
+        <p:txBody>
+          <a:bodyPr wrap="square" lIns="0" rIns="0" tIns="0" bIns="0" anchor="t">
+            <a:spAutoFit/>
+          </a:bodyPr>
+          <a:lstStyle/>
+          <a:p>
+            <a:pPr algn="r">
+              <a:lnSpc>
+                <a:spcPts val="942"/>
+              </a:lnSpc>
+            </a:pPr>
+            <a:r>
+              <a:rPr sz="650" b="1" spc="200">
+                <a:solidFill>
+                  <a:srgbClr val="6B7280"/>
+                </a:solidFill>
+                <a:latin typeface="맑은 고딕"/>
+                <a:ea typeface="맑은 고딕"/>
+              </a:rPr>
+              <a:t>소속 · 브랜드</a:t>
+            </a:r>
+          </a:p>
+        </p:txBody>
+      </p:sp>
       <p:cxnSp>
         <p:nvCxnSpPr>
           <p:cNvPr id="6" name="Connector 5"/>
@@ -3243,71 +3254,69 @@
         </p:nvCxnSpPr>
         <p:spPr>
           <a:xfrm>
-            <a:off x="2989296" y="1406736"/>
-            <a:ext cx="69264" cy="69264"/>
+            <a:off x="252000" y="1051200"/>
+            <a:ext cx="2736000" cy="0"/>
           </a:xfrm>
           <a:prstGeom prst="line">
             <a:avLst/>
           </a:prstGeom>
-          <a:ln w="21312">
+          <a:ln w="5760">
             <a:solidFill>
-              <a:srgbClr val="FFFFFF"/>
+              <a:srgbClr val="DCDFE4"/>
             </a:solidFill>
           </a:ln>
         </p:spPr>
       </p:cxnSp>
-      <p:cxnSp>
-        <p:nvCxnSpPr>
-          <p:cNvPr id="7" name="Connector 6"/>
-          <p:cNvCxnSpPr/>
+      <p:sp>
+        <p:nvSpPr>
+          <p:cNvPr id="7" name="텍스트"/>
+          <p:cNvSpPr txBox="1"/>
           <p:nvPr/>
-        </p:nvCxnSpPr>
-        <p:spPr>
-          <a:xfrm flipH="1">
-            <a:off x="2989296" y="1476000"/>
-            <a:ext cx="69264" cy="69264"/>
-          </a:xfrm>
-          <a:prstGeom prst="line">
+        </p:nvSpPr>
+        <p:spPr>
+          <a:xfrm>
+            <a:off x="252000" y="1123200"/>
+            <a:ext cx="576000" cy="99061"/>
+          </a:xfrm>
+          <a:prstGeom prst="rect">
             <a:avLst/>
           </a:prstGeom>
-          <a:ln w="21312">
-            <a:solidFill>
-              <a:srgbClr val="FFFFFF"/>
-            </a:solidFill>
-          </a:ln>
-        </p:spPr>
-      </p:cxnSp>
-      <p:cxnSp>
-        <p:nvCxnSpPr>
-          <p:cNvPr id="8" name="Connector 7"/>
-          <p:cNvCxnSpPr/>
-          <p:nvPr/>
-        </p:nvCxnSpPr>
-        <p:spPr>
-          <a:xfrm flipH="1">
-            <a:off x="2930688" y="1385424"/>
-            <a:ext cx="42624" cy="181152"/>
-          </a:xfrm>
-          <a:prstGeom prst="line">
-            <a:avLst/>
-          </a:prstGeom>
-          <a:ln w="18648">
-            <a:solidFill>
-              <a:srgbClr val="737373"/>
-            </a:solidFill>
-          </a:ln>
-        </p:spPr>
-      </p:cxnSp>
-      <p:sp>
-        <p:nvSpPr>
-          <p:cNvPr id="9" name="텍스트"/>
+          <a:noFill/>
+        </p:spPr>
+        <p:txBody>
+          <a:bodyPr wrap="square" lIns="0" rIns="0" tIns="0" bIns="0" anchor="t">
+            <a:spAutoFit/>
+          </a:bodyPr>
+          <a:lstStyle/>
+          <a:p>
+            <a:pPr algn="l">
+              <a:lnSpc>
+                <a:spcPts val="754"/>
+              </a:lnSpc>
+            </a:pPr>
+            <a:r>
+              <a:rPr sz="520" b="1" spc="150">
+                <a:solidFill>
+                  <a:srgbClr val="6B7280"/>
+                </a:solidFill>
+                <a:latin typeface="맑은 고딕"/>
+                <a:ea typeface="맑은 고딕"/>
+              </a:rPr>
+              <a:t>TEL</a:t>
+            </a:r>
+          </a:p>
+        </p:txBody>
+      </p:sp>
+      <p:sp>
+        <p:nvSpPr>
+          <p:cNvPr id="8" name="텍스트"/>
           <p:cNvSpPr txBox="1"/>
           <p:nvPr/>
         </p:nvSpPr>
         <p:spPr>
           <a:xfrm>
-            <a:off x="252000" y="201600"/>
-            <a:ext cx="1800000" cy="100800"/>
+            <a:off x="900000" y="1101600"/>
+            <a:ext cx="2088000" cy="142876"/>
           </a:xfrm>
           <a:prstGeom prst="rect">
             <a:avLst/>
@@ -3326,198 +3335,9 @@
               </a:lnSpc>
             </a:pPr>
             <a:r>
-              <a:rPr sz="750" b="1" spc="150">
+              <a:rPr sz="750" b="0">
                 <a:solidFill>
-                  <a:srgbClr val="5B7168"/>
-                </a:solidFill>
-                <a:latin typeface="맑은 고딕"/>
-                <a:ea typeface="맑은 고딕"/>
-              </a:rPr>
-              <a:t>소속 · 브랜드</a:t>
-            </a:r>
-          </a:p>
-        </p:txBody>
-      </p:sp>
-      <p:sp>
-        <p:nvSpPr>
-          <p:cNvPr id="10" name="텍스트"/>
-          <p:cNvSpPr txBox="1"/>
-          <p:nvPr/>
-        </p:nvSpPr>
-        <p:spPr>
-          <a:xfrm>
-            <a:off x="252000" y="360000"/>
-            <a:ext cx="2016000" cy="313692"/>
-          </a:xfrm>
-          <a:prstGeom prst="rect">
-            <a:avLst/>
-          </a:prstGeom>
-          <a:noFill/>
-        </p:spPr>
-        <p:txBody>
-          <a:bodyPr wrap="square" lIns="0" rIns="0" tIns="0" bIns="0" anchor="t">
-            <a:spAutoFit/>
-          </a:bodyPr>
-          <a:lstStyle/>
-          <a:p>
-            <a:pPr algn="l">
-              <a:lnSpc>
-                <a:spcPts val="2755"/>
-              </a:lnSpc>
-            </a:pPr>
-            <a:r>
-              <a:rPr sz="1900" b="1" spc="50">
-                <a:solidFill>
-                  <a:srgbClr val="143D30"/>
-                </a:solidFill>
-                <a:latin typeface="맑은 고딕"/>
-                <a:ea typeface="맑은 고딕"/>
-              </a:rPr>
-              <a:t>연주혁</a:t>
-            </a:r>
-          </a:p>
-        </p:txBody>
-      </p:sp>
-      <p:sp>
-        <p:nvSpPr>
-          <p:cNvPr id="11" name="텍스트"/>
-          <p:cNvSpPr txBox="1"/>
-          <p:nvPr/>
-        </p:nvSpPr>
-        <p:spPr>
-          <a:xfrm>
-            <a:off x="252000" y="655200"/>
-            <a:ext cx="1872000" cy="122400"/>
-          </a:xfrm>
-          <a:prstGeom prst="rect">
-            <a:avLst/>
-          </a:prstGeom>
-          <a:noFill/>
-        </p:spPr>
-        <p:txBody>
-          <a:bodyPr wrap="square" lIns="0" rIns="0" tIns="0" bIns="0" anchor="t">
-            <a:spAutoFit/>
-          </a:bodyPr>
-          <a:lstStyle/>
-          <a:p>
-            <a:pPr algn="l">
-              <a:lnSpc>
-                <a:spcPts val="1232"/>
-              </a:lnSpc>
-            </a:pPr>
-            <a:r>
-              <a:rPr sz="850" b="1">
-                <a:solidFill>
-                  <a:srgbClr val="913B83"/>
-                </a:solidFill>
-                <a:latin typeface="맑은 고딕"/>
-                <a:ea typeface="맑은 고딕"/>
-              </a:rPr>
-              <a:t>경영 컨설턴트</a:t>
-            </a:r>
-          </a:p>
-        </p:txBody>
-      </p:sp>
-      <p:sp>
-        <p:nvSpPr>
-          <p:cNvPr id="12" name="Rectangle 11"/>
-          <p:cNvSpPr/>
-          <p:nvPr/>
-        </p:nvSpPr>
-        <p:spPr>
-          <a:xfrm>
-            <a:off x="252000" y="864000"/>
-            <a:ext cx="230400" cy="14400"/>
-          </a:xfrm>
-          <a:prstGeom prst="rect">
-            <a:avLst/>
-          </a:prstGeom>
-          <a:solidFill>
-            <a:srgbClr val="913B83"/>
-          </a:solidFill>
-          <a:ln>
-            <a:noFill/>
-          </a:ln>
-        </p:spPr>
-        <p:txBody>
-          <a:bodyPr rtlCol="0" anchor="ctr"/>
-          <a:lstStyle/>
-          <a:p>
-            <a:pPr algn="ctr"/>
-          </a:p>
-        </p:txBody>
-      </p:sp>
-      <p:sp>
-        <p:nvSpPr>
-          <p:cNvPr id="13" name="텍스트"/>
-          <p:cNvSpPr txBox="1"/>
-          <p:nvPr/>
-        </p:nvSpPr>
-        <p:spPr>
-          <a:xfrm>
-            <a:off x="252000" y="1044000"/>
-            <a:ext cx="122400" cy="168911"/>
-          </a:xfrm>
-          <a:prstGeom prst="rect">
-            <a:avLst/>
-          </a:prstGeom>
-          <a:noFill/>
-        </p:spPr>
-        <p:txBody>
-          <a:bodyPr wrap="square" lIns="0" rIns="0" tIns="0" bIns="0" anchor="t">
-            <a:spAutoFit/>
-          </a:bodyPr>
-          <a:lstStyle/>
-          <a:p>
-            <a:pPr algn="l">
-              <a:lnSpc>
-                <a:spcPts val="1015"/>
-              </a:lnSpc>
-            </a:pPr>
-            <a:r>
-              <a:rPr sz="700" b="1">
-                <a:solidFill>
-                  <a:srgbClr val="913B83"/>
-                </a:solidFill>
-                <a:latin typeface="맑은 고딕"/>
-                <a:ea typeface="맑은 고딕"/>
-              </a:rPr>
-              <a:t>T</a:t>
-            </a:r>
-          </a:p>
-        </p:txBody>
-      </p:sp>
-      <p:sp>
-        <p:nvSpPr>
-          <p:cNvPr id="14" name="텍스트"/>
-          <p:cNvSpPr txBox="1"/>
-          <p:nvPr/>
-        </p:nvSpPr>
-        <p:spPr>
-          <a:xfrm>
-            <a:off x="396000" y="1044000"/>
-            <a:ext cx="1584000" cy="168911"/>
-          </a:xfrm>
-          <a:prstGeom prst="rect">
-            <a:avLst/>
-          </a:prstGeom>
-          <a:noFill/>
-        </p:spPr>
-        <p:txBody>
-          <a:bodyPr wrap="square" lIns="0" rIns="0" tIns="0" bIns="0" anchor="t">
-            <a:spAutoFit/>
-          </a:bodyPr>
-          <a:lstStyle/>
-          <a:p>
-            <a:pPr algn="l">
-              <a:lnSpc>
-                <a:spcPts val="1015"/>
-              </a:lnSpc>
-            </a:pPr>
-            <a:r>
-              <a:rPr sz="700" b="0">
-                <a:solidFill>
-                  <a:srgbClr val="143D30"/>
+                  <a:srgbClr val="12151C"/>
                 </a:solidFill>
                 <a:latin typeface="맑은 고딕"/>
                 <a:ea typeface="맑은 고딕"/>
@@ -3527,16 +3347,37 @@
           </a:p>
         </p:txBody>
       </p:sp>
-      <p:sp>
-        <p:nvSpPr>
-          <p:cNvPr id="15" name="텍스트"/>
+      <p:cxnSp>
+        <p:nvCxnSpPr>
+          <p:cNvPr id="9" name="Connector 8"/>
+          <p:cNvCxnSpPr/>
+          <p:nvPr/>
+        </p:nvCxnSpPr>
+        <p:spPr>
+          <a:xfrm>
+            <a:off x="252000" y="1274400"/>
+            <a:ext cx="2736000" cy="0"/>
+          </a:xfrm>
+          <a:prstGeom prst="line">
+            <a:avLst/>
+          </a:prstGeom>
+          <a:ln w="5760">
+            <a:solidFill>
+              <a:srgbClr val="DCDFE4"/>
+            </a:solidFill>
+          </a:ln>
+        </p:spPr>
+      </p:cxnSp>
+      <p:sp>
+        <p:nvSpPr>
+          <p:cNvPr id="10" name="텍스트"/>
           <p:cNvSpPr txBox="1"/>
           <p:nvPr/>
         </p:nvSpPr>
         <p:spPr>
           <a:xfrm>
-            <a:off x="252000" y="1212911"/>
-            <a:ext cx="122400" cy="168911"/>
+            <a:off x="252000" y="1346400"/>
+            <a:ext cx="576000" cy="99061"/>
           </a:xfrm>
           <a:prstGeom prst="rect">
             <a:avLst/>
@@ -3551,32 +3392,32 @@
           <a:p>
             <a:pPr algn="l">
               <a:lnSpc>
-                <a:spcPts val="1015"/>
+                <a:spcPts val="754"/>
               </a:lnSpc>
             </a:pPr>
             <a:r>
-              <a:rPr sz="700" b="1">
+              <a:rPr sz="520" b="1" spc="150">
                 <a:solidFill>
-                  <a:srgbClr val="913B83"/>
+                  <a:srgbClr val="6B7280"/>
                 </a:solidFill>
                 <a:latin typeface="맑은 고딕"/>
                 <a:ea typeface="맑은 고딕"/>
               </a:rPr>
-              <a:t>E</a:t>
-            </a:r>
-          </a:p>
-        </p:txBody>
-      </p:sp>
-      <p:sp>
-        <p:nvSpPr>
-          <p:cNvPr id="16" name="텍스트"/>
+              <a:t>MAIL</a:t>
+            </a:r>
+          </a:p>
+        </p:txBody>
+      </p:sp>
+      <p:sp>
+        <p:nvSpPr>
+          <p:cNvPr id="11" name="텍스트"/>
           <p:cNvSpPr txBox="1"/>
           <p:nvPr/>
         </p:nvSpPr>
         <p:spPr>
           <a:xfrm>
-            <a:off x="396000" y="1212911"/>
-            <a:ext cx="1584000" cy="168911"/>
+            <a:off x="900000" y="1324800"/>
+            <a:ext cx="2088000" cy="142876"/>
           </a:xfrm>
           <a:prstGeom prst="rect">
             <a:avLst/>
@@ -3591,13 +3432,13 @@
           <a:p>
             <a:pPr algn="l">
               <a:lnSpc>
-                <a:spcPts val="1015"/>
+                <a:spcPts val="1087"/>
               </a:lnSpc>
             </a:pPr>
             <a:r>
-              <a:rPr sz="700" b="0">
+              <a:rPr sz="750" b="0">
                 <a:solidFill>
-                  <a:srgbClr val="143D30"/>
+                  <a:srgbClr val="12151C"/>
                 </a:solidFill>
                 <a:latin typeface="맑은 고딕"/>
                 <a:ea typeface="맑은 고딕"/>
@@ -3607,16 +3448,37 @@
           </a:p>
         </p:txBody>
       </p:sp>
-      <p:sp>
-        <p:nvSpPr>
-          <p:cNvPr id="17" name="텍스트"/>
+      <p:cxnSp>
+        <p:nvCxnSpPr>
+          <p:cNvPr id="12" name="Connector 11"/>
+          <p:cNvCxnSpPr/>
+          <p:nvPr/>
+        </p:nvCxnSpPr>
+        <p:spPr>
+          <a:xfrm>
+            <a:off x="252000" y="1497600"/>
+            <a:ext cx="2736000" cy="0"/>
+          </a:xfrm>
+          <a:prstGeom prst="line">
+            <a:avLst/>
+          </a:prstGeom>
+          <a:ln w="5760">
+            <a:solidFill>
+              <a:srgbClr val="DCDFE4"/>
+            </a:solidFill>
+          </a:ln>
+        </p:spPr>
+      </p:cxnSp>
+      <p:sp>
+        <p:nvSpPr>
+          <p:cNvPr id="13" name="텍스트"/>
           <p:cNvSpPr txBox="1"/>
           <p:nvPr/>
         </p:nvSpPr>
         <p:spPr>
           <a:xfrm>
-            <a:off x="252000" y="1381822"/>
-            <a:ext cx="122400" cy="168911"/>
+            <a:off x="252000" y="1569600"/>
+            <a:ext cx="576000" cy="99061"/>
           </a:xfrm>
           <a:prstGeom prst="rect">
             <a:avLst/>
@@ -3631,32 +3493,32 @@
           <a:p>
             <a:pPr algn="l">
               <a:lnSpc>
-                <a:spcPts val="1015"/>
+                <a:spcPts val="754"/>
               </a:lnSpc>
             </a:pPr>
             <a:r>
-              <a:rPr sz="700" b="1">
+              <a:rPr sz="520" b="1" spc="150">
                 <a:solidFill>
-                  <a:srgbClr val="913B83"/>
+                  <a:srgbClr val="6B7280"/>
                 </a:solidFill>
                 <a:latin typeface="맑은 고딕"/>
                 <a:ea typeface="맑은 고딕"/>
               </a:rPr>
-              <a:t>A</a:t>
-            </a:r>
-          </a:p>
-        </p:txBody>
-      </p:sp>
-      <p:sp>
-        <p:nvSpPr>
-          <p:cNvPr id="18" name="텍스트"/>
+              <a:t>ADDR</a:t>
+            </a:r>
+          </a:p>
+        </p:txBody>
+      </p:sp>
+      <p:sp>
+        <p:nvSpPr>
+          <p:cNvPr id="14" name="텍스트"/>
           <p:cNvSpPr txBox="1"/>
           <p:nvPr/>
         </p:nvSpPr>
         <p:spPr>
           <a:xfrm>
-            <a:off x="396000" y="1381822"/>
-            <a:ext cx="1584000" cy="168911"/>
+            <a:off x="900000" y="1548000"/>
+            <a:ext cx="2088000" cy="142876"/>
           </a:xfrm>
           <a:prstGeom prst="rect">
             <a:avLst/>
@@ -3671,13 +3533,13 @@
           <a:p>
             <a:pPr algn="l">
               <a:lnSpc>
-                <a:spcPts val="1015"/>
+                <a:spcPts val="1087"/>
               </a:lnSpc>
             </a:pPr>
             <a:r>
-              <a:rPr sz="700" b="0">
+              <a:rPr sz="750" b="0">
                 <a:solidFill>
-                  <a:srgbClr val="143D30"/>
+                  <a:srgbClr val="12151C"/>
                 </a:solidFill>
                 <a:latin typeface="맑은 고딕"/>
                 <a:ea typeface="맑은 고딕"/>
@@ -3687,6 +3549,27 @@
           </a:p>
         </p:txBody>
       </p:sp>
+      <p:cxnSp>
+        <p:nvCxnSpPr>
+          <p:cNvPr id="15" name="Connector 14"/>
+          <p:cNvCxnSpPr/>
+          <p:nvPr/>
+        </p:nvCxnSpPr>
+        <p:spPr>
+          <a:xfrm>
+            <a:off x="252000" y="1720800"/>
+            <a:ext cx="2736000" cy="0"/>
+          </a:xfrm>
+          <a:prstGeom prst="line">
+            <a:avLst/>
+          </a:prstGeom>
+          <a:ln w="5760">
+            <a:solidFill>
+              <a:srgbClr val="DCDFE4"/>
+            </a:solidFill>
+          </a:ln>
+        </p:spPr>
+      </p:cxnSp>
     </p:spTree>
   </p:cSld>
   <p:clrMapOvr>
@@ -3701,7 +3584,7 @@
     <p:bg>
       <p:bgPr>
         <a:solidFill>
-          <a:srgbClr val="F0FAF6"/>
+          <a:srgbClr val="FFFFFF"/>
         </a:solidFill>
         <a:effectLst/>
       </p:bgPr>
@@ -3715,20 +3598,60 @@
       <p:grpSpPr/>
       <p:sp>
         <p:nvSpPr>
-          <p:cNvPr id="2" name="Rectangle 1"/>
+          <p:cNvPr id="2" name="텍스트"/>
+          <p:cNvSpPr txBox="1"/>
+          <p:nvPr/>
+        </p:nvSpPr>
+        <p:spPr>
+          <a:xfrm>
+            <a:off x="252000" y="324000"/>
+            <a:ext cx="2520000" cy="792000"/>
+          </a:xfrm>
+          <a:prstGeom prst="rect">
+            <a:avLst/>
+          </a:prstGeom>
+          <a:noFill/>
+        </p:spPr>
+        <p:txBody>
+          <a:bodyPr wrap="square" lIns="0" rIns="0" tIns="0" bIns="0" anchor="t">
+            <a:spAutoFit/>
+          </a:bodyPr>
+          <a:lstStyle/>
+          <a:p>
+            <a:pPr algn="l">
+              <a:lnSpc>
+                <a:spcPts val="1884"/>
+              </a:lnSpc>
+            </a:pPr>
+            <a:r>
+              <a:rPr sz="1300" b="1">
+                <a:solidFill>
+                  <a:srgbClr val="12151C"/>
+                </a:solidFill>
+                <a:latin typeface="맑은 고딕"/>
+                <a:ea typeface="맑은 고딕"/>
+              </a:rPr>
+              <a:t>당신의 목표에 맞춰 설계합니다</a:t>
+            </a:r>
+          </a:p>
+        </p:txBody>
+      </p:sp>
+      <p:sp>
+        <p:nvSpPr>
+          <p:cNvPr id="3" name="Rectangle 2"/>
           <p:cNvSpPr/>
           <p:nvPr/>
         </p:nvSpPr>
         <p:spPr>
           <a:xfrm>
-            <a:off x="0" y="0"/>
-            <a:ext cx="1224000" cy="1800000"/>
+            <a:off x="0" y="1476000"/>
+            <a:ext cx="3240000" cy="324000"/>
           </a:xfrm>
           <a:prstGeom prst="rect">
             <a:avLst/>
           </a:prstGeom>
           <a:solidFill>
-            <a:srgbClr val="246B53"/>
+            <a:srgbClr val="F0262F"/>
           </a:solidFill>
           <a:ln>
             <a:noFill/>
@@ -3742,207 +3665,16 @@
           </a:p>
         </p:txBody>
       </p:sp>
-      <p:cxnSp>
-        <p:nvCxnSpPr>
-          <p:cNvPr id="3" name="Connector 2"/>
-          <p:cNvCxnSpPr/>
-          <p:nvPr/>
-        </p:nvCxnSpPr>
-        <p:spPr>
-          <a:xfrm flipH="1">
-            <a:off x="396000" y="759600"/>
-            <a:ext cx="140400" cy="140400"/>
-          </a:xfrm>
-          <a:prstGeom prst="line">
-            <a:avLst/>
-          </a:prstGeom>
-          <a:ln w="43200">
-            <a:solidFill>
-              <a:srgbClr val="FFFFFF"/>
-            </a:solidFill>
-          </a:ln>
-        </p:spPr>
-      </p:cxnSp>
-      <p:cxnSp>
-        <p:nvCxnSpPr>
-          <p:cNvPr id="4" name="Connector 3"/>
-          <p:cNvCxnSpPr/>
-          <p:nvPr/>
-        </p:nvCxnSpPr>
-        <p:spPr>
-          <a:xfrm>
-            <a:off x="396000" y="900000"/>
-            <a:ext cx="140400" cy="140400"/>
-          </a:xfrm>
-          <a:prstGeom prst="line">
-            <a:avLst/>
-          </a:prstGeom>
-          <a:ln w="43200">
-            <a:solidFill>
-              <a:srgbClr val="FFFFFF"/>
-            </a:solidFill>
-          </a:ln>
-        </p:spPr>
-      </p:cxnSp>
-      <p:cxnSp>
-        <p:nvCxnSpPr>
-          <p:cNvPr id="5" name="Connector 4"/>
-          <p:cNvCxnSpPr/>
-          <p:nvPr/>
-        </p:nvCxnSpPr>
-        <p:spPr>
-          <a:xfrm>
-            <a:off x="687600" y="759600"/>
-            <a:ext cx="140400" cy="140400"/>
-          </a:xfrm>
-          <a:prstGeom prst="line">
-            <a:avLst/>
-          </a:prstGeom>
-          <a:ln w="43200">
-            <a:solidFill>
-              <a:srgbClr val="FFFFFF"/>
-            </a:solidFill>
-          </a:ln>
-        </p:spPr>
-      </p:cxnSp>
-      <p:cxnSp>
-        <p:nvCxnSpPr>
-          <p:cNvPr id="6" name="Connector 5"/>
-          <p:cNvCxnSpPr/>
-          <p:nvPr/>
-        </p:nvCxnSpPr>
-        <p:spPr>
-          <a:xfrm flipH="1">
-            <a:off x="687600" y="900000"/>
-            <a:ext cx="140400" cy="140400"/>
-          </a:xfrm>
-          <a:prstGeom prst="line">
-            <a:avLst/>
-          </a:prstGeom>
-          <a:ln w="43200">
-            <a:solidFill>
-              <a:srgbClr val="FFFFFF"/>
-            </a:solidFill>
-          </a:ln>
-        </p:spPr>
-      </p:cxnSp>
-      <p:cxnSp>
-        <p:nvCxnSpPr>
-          <p:cNvPr id="7" name="Connector 6"/>
-          <p:cNvCxnSpPr/>
-          <p:nvPr/>
-        </p:nvCxnSpPr>
-        <p:spPr>
-          <a:xfrm flipH="1">
-            <a:off x="568800" y="716400"/>
-            <a:ext cx="86400" cy="367200"/>
-          </a:xfrm>
-          <a:prstGeom prst="line">
-            <a:avLst/>
-          </a:prstGeom>
-          <a:ln w="37800">
-            <a:solidFill>
-              <a:srgbClr val="808080"/>
-            </a:solidFill>
-          </a:ln>
-        </p:spPr>
-      </p:cxnSp>
-      <p:sp>
-        <p:nvSpPr>
-          <p:cNvPr id="8" name="텍스트"/>
+      <p:sp>
+        <p:nvSpPr>
+          <p:cNvPr id="4" name="텍스트"/>
           <p:cNvSpPr txBox="1"/>
           <p:nvPr/>
         </p:nvSpPr>
         <p:spPr>
           <a:xfrm>
-            <a:off x="1440000" y="432000"/>
-            <a:ext cx="1584000" cy="792000"/>
-          </a:xfrm>
-          <a:prstGeom prst="rect">
-            <a:avLst/>
-          </a:prstGeom>
-          <a:noFill/>
-        </p:spPr>
-        <p:txBody>
-          <a:bodyPr wrap="square" lIns="0" rIns="0" tIns="0" bIns="0" anchor="ctr">
-            <a:spAutoFit/>
-          </a:bodyPr>
-          <a:lstStyle/>
-          <a:p>
-            <a:pPr algn="l">
-              <a:lnSpc>
-                <a:spcPts val="1667"/>
-              </a:lnSpc>
-            </a:pPr>
-            <a:r>
-              <a:rPr sz="1150" b="1">
-                <a:solidFill>
-                  <a:srgbClr val="143D30"/>
-                </a:solidFill>
-                <a:latin typeface="맑은 고딕"/>
-                <a:ea typeface="맑은 고딕"/>
-              </a:rPr>
-              <a:t>당신의 목표에</a:t>
-            </a:r>
-          </a:p>
-          <a:p>
-            <a:pPr algn="l">
-              <a:lnSpc>
-                <a:spcPts val="1667"/>
-              </a:lnSpc>
-            </a:pPr>
-            <a:r>
-              <a:rPr sz="1150" b="1">
-                <a:solidFill>
-                  <a:srgbClr val="143D30"/>
-                </a:solidFill>
-                <a:latin typeface="맑은 고딕"/>
-                <a:ea typeface="맑은 고딕"/>
-              </a:rPr>
-              <a:t>맞춰 설계합니다</a:t>
-            </a:r>
-          </a:p>
-        </p:txBody>
-      </p:sp>
-      <p:sp>
-        <p:nvSpPr>
-          <p:cNvPr id="9" name="Rectangle 8"/>
-          <p:cNvSpPr/>
-          <p:nvPr/>
-        </p:nvSpPr>
-        <p:spPr>
-          <a:xfrm>
-            <a:off x="1440000" y="1317600"/>
-            <a:ext cx="180000" cy="10800"/>
-          </a:xfrm>
-          <a:prstGeom prst="rect">
-            <a:avLst/>
-          </a:prstGeom>
-          <a:solidFill>
-            <a:srgbClr val="246B53"/>
-          </a:solidFill>
-          <a:ln>
-            <a:noFill/>
-          </a:ln>
-        </p:spPr>
-        <p:txBody>
-          <a:bodyPr rtlCol="0" anchor="ctr"/>
-          <a:lstStyle/>
-          <a:p>
-            <a:pPr algn="ctr"/>
-          </a:p>
-        </p:txBody>
-      </p:sp>
-      <p:sp>
-        <p:nvSpPr>
-          <p:cNvPr id="10" name="텍스트"/>
-          <p:cNvSpPr txBox="1"/>
-          <p:nvPr/>
-        </p:nvSpPr>
-        <p:spPr>
-          <a:xfrm>
-            <a:off x="1440000" y="1418400"/>
-            <a:ext cx="1584000" cy="108000"/>
+            <a:off x="252000" y="1569600"/>
+            <a:ext cx="1872000" cy="142876"/>
           </a:xfrm>
           <a:prstGeom prst="rect">
             <a:avLst/>
@@ -3963,13 +3695,104 @@
             <a:r>
               <a:rPr sz="750" b="1" spc="200">
                 <a:solidFill>
-                  <a:srgbClr val="577269"/>
+                  <a:srgbClr val="FFFFFF"/>
                 </a:solidFill>
                 <a:latin typeface="맑은 고딕"/>
                 <a:ea typeface="맑은 고딕"/>
               </a:rPr>
               <a:t>소속 · 브랜드</a:t>
             </a:r>
+          </a:p>
+        </p:txBody>
+      </p:sp>
+      <p:sp>
+        <p:nvSpPr>
+          <p:cNvPr id="5" name="Oval 4"/>
+          <p:cNvSpPr/>
+          <p:nvPr/>
+        </p:nvSpPr>
+        <p:spPr>
+          <a:xfrm>
+            <a:off x="2714400" y="1616400"/>
+            <a:ext cx="43200" cy="43200"/>
+          </a:xfrm>
+          <a:prstGeom prst="ellipse">
+            <a:avLst/>
+          </a:prstGeom>
+          <a:solidFill>
+            <a:srgbClr val="FFFFFF"/>
+          </a:solidFill>
+          <a:ln>
+            <a:noFill/>
+          </a:ln>
+        </p:spPr>
+        <p:txBody>
+          <a:bodyPr rtlCol="0" anchor="ctr"/>
+          <a:lstStyle/>
+          <a:p>
+            <a:pPr algn="ctr"/>
+          </a:p>
+        </p:txBody>
+      </p:sp>
+      <p:sp>
+        <p:nvSpPr>
+          <p:cNvPr id="6" name="Oval 5"/>
+          <p:cNvSpPr/>
+          <p:nvPr/>
+        </p:nvSpPr>
+        <p:spPr>
+          <a:xfrm>
+            <a:off x="2822400" y="1616400"/>
+            <a:ext cx="43200" cy="43200"/>
+          </a:xfrm>
+          <a:prstGeom prst="ellipse">
+            <a:avLst/>
+          </a:prstGeom>
+          <a:solidFill>
+            <a:srgbClr val="FFFFFF">
+              <a:alpha val="50000"/>
+            </a:srgbClr>
+          </a:solidFill>
+          <a:ln>
+            <a:noFill/>
+          </a:ln>
+        </p:spPr>
+        <p:txBody>
+          <a:bodyPr rtlCol="0" anchor="ctr"/>
+          <a:lstStyle/>
+          <a:p>
+            <a:pPr algn="ctr"/>
+          </a:p>
+        </p:txBody>
+      </p:sp>
+      <p:sp>
+        <p:nvSpPr>
+          <p:cNvPr id="7" name="Oval 6"/>
+          <p:cNvSpPr/>
+          <p:nvPr/>
+        </p:nvSpPr>
+        <p:spPr>
+          <a:xfrm>
+            <a:off x="2930400" y="1616400"/>
+            <a:ext cx="43200" cy="43200"/>
+          </a:xfrm>
+          <a:prstGeom prst="ellipse">
+            <a:avLst/>
+          </a:prstGeom>
+          <a:solidFill>
+            <a:srgbClr val="FFFFFF">
+              <a:alpha val="50000"/>
+            </a:srgbClr>
+          </a:solidFill>
+          <a:ln>
+            <a:noFill/>
+          </a:ln>
+        </p:spPr>
+        <p:txBody>
+          <a:bodyPr rtlCol="0" anchor="ctr"/>
+          <a:lstStyle/>
+          <a:p>
+            <a:pPr algn="ctr"/>
           </a:p>
         </p:txBody>
       </p:sp>

--- a/public/fun/cards/expert/expert-44.pptx
+++ b/public/fun/cards/expert/expert-44.pptx
@@ -3105,8 +3105,8 @@
         </p:nvSpPr>
         <p:spPr>
           <a:xfrm>
-            <a:off x="252000" y="144000"/>
-            <a:ext cx="201600" cy="21600"/>
+            <a:off x="0" y="0"/>
+            <a:ext cx="3240000" cy="36000"/>
           </a:xfrm>
           <a:prstGeom prst="rect">
             <a:avLst/>
@@ -3134,8 +3134,8 @@
         </p:nvSpPr>
         <p:spPr>
           <a:xfrm>
-            <a:off x="252000" y="273600"/>
-            <a:ext cx="2160000" cy="360000"/>
+            <a:off x="252000" y="223200"/>
+            <a:ext cx="1296000" cy="237600"/>
           </a:xfrm>
           <a:prstGeom prst="rect">
             <a:avLst/>
@@ -3150,11 +3150,11 @@
           <a:p>
             <a:pPr algn="l">
               <a:lnSpc>
-                <a:spcPts val="3190"/>
+                <a:spcPts val="1957"/>
               </a:lnSpc>
             </a:pPr>
             <a:r>
-              <a:rPr sz="2200" b="1">
+              <a:rPr sz="1350" b="1" spc="120">
                 <a:solidFill>
                   <a:srgbClr val="12151C"/>
                 </a:solidFill>
@@ -3174,8 +3174,8 @@
         </p:nvSpPr>
         <p:spPr>
           <a:xfrm>
-            <a:off x="252000" y="676800"/>
-            <a:ext cx="2160000" cy="171451"/>
+            <a:off x="252000" y="475200"/>
+            <a:ext cx="1296000" cy="133351"/>
           </a:xfrm>
           <a:prstGeom prst="rect">
             <a:avLst/>
@@ -3190,11 +3190,11 @@
           <a:p>
             <a:pPr algn="l">
               <a:lnSpc>
-                <a:spcPts val="1305"/>
+                <a:spcPts val="1015"/>
               </a:lnSpc>
             </a:pPr>
             <a:r>
-              <a:rPr sz="900" b="0">
+              <a:rPr sz="700" b="0">
                 <a:solidFill>
                   <a:srgbClr val="6B7280"/>
                 </a:solidFill>
@@ -3214,7 +3214,7 @@
         </p:nvSpPr>
         <p:spPr>
           <a:xfrm>
-            <a:off x="1548000" y="230400"/>
+            <a:off x="1548000" y="259200"/>
             <a:ext cx="1440000" cy="123826"/>
           </a:xfrm>
           <a:prstGeom prst="rect">
@@ -3234,7 +3234,7 @@
               </a:lnSpc>
             </a:pPr>
             <a:r>
-              <a:rPr sz="650" b="1" spc="200">
+              <a:rPr sz="650" b="1" spc="220">
                 <a:solidFill>
                   <a:srgbClr val="6B7280"/>
                 </a:solidFill>
@@ -3254,13 +3254,13 @@
         </p:nvCxnSpPr>
         <p:spPr>
           <a:xfrm>
-            <a:off x="252000" y="1051200"/>
+            <a:off x="252000" y="907200"/>
             <a:ext cx="2736000" cy="0"/>
           </a:xfrm>
           <a:prstGeom prst="line">
             <a:avLst/>
           </a:prstGeom>
-          <a:ln w="5760">
+          <a:ln w="3600">
             <a:solidFill>
               <a:srgbClr val="DCDFE4"/>
             </a:solidFill>
@@ -3275,8 +3275,8 @@
         </p:nvSpPr>
         <p:spPr>
           <a:xfrm>
-            <a:off x="252000" y="1123200"/>
-            <a:ext cx="576000" cy="99061"/>
+            <a:off x="252000" y="986400"/>
+            <a:ext cx="576000" cy="91441"/>
           </a:xfrm>
           <a:prstGeom prst="rect">
             <a:avLst/>
@@ -3291,11 +3291,11 @@
           <a:p>
             <a:pPr algn="l">
               <a:lnSpc>
-                <a:spcPts val="754"/>
+                <a:spcPts val="696"/>
               </a:lnSpc>
             </a:pPr>
             <a:r>
-              <a:rPr sz="520" b="1" spc="150">
+              <a:rPr sz="480" b="1" spc="160">
                 <a:solidFill>
                   <a:srgbClr val="6B7280"/>
                 </a:solidFill>
@@ -3315,8 +3315,8 @@
         </p:nvSpPr>
         <p:spPr>
           <a:xfrm>
-            <a:off x="900000" y="1101600"/>
-            <a:ext cx="2088000" cy="142876"/>
+            <a:off x="936000" y="968400"/>
+            <a:ext cx="2052000" cy="133351"/>
           </a:xfrm>
           <a:prstGeom prst="rect">
             <a:avLst/>
@@ -3331,11 +3331,11 @@
           <a:p>
             <a:pPr algn="l">
               <a:lnSpc>
-                <a:spcPts val="1087"/>
+                <a:spcPts val="1015"/>
               </a:lnSpc>
             </a:pPr>
             <a:r>
-              <a:rPr sz="750" b="0">
+              <a:rPr sz="700" b="0">
                 <a:solidFill>
                   <a:srgbClr val="12151C"/>
                 </a:solidFill>
@@ -3355,13 +3355,13 @@
         </p:nvCxnSpPr>
         <p:spPr>
           <a:xfrm>
-            <a:off x="252000" y="1274400"/>
+            <a:off x="252000" y="1137600"/>
             <a:ext cx="2736000" cy="0"/>
           </a:xfrm>
           <a:prstGeom prst="line">
             <a:avLst/>
           </a:prstGeom>
-          <a:ln w="5760">
+          <a:ln w="3600">
             <a:solidFill>
               <a:srgbClr val="DCDFE4"/>
             </a:solidFill>
@@ -3376,8 +3376,8 @@
         </p:nvSpPr>
         <p:spPr>
           <a:xfrm>
-            <a:off x="252000" y="1346400"/>
-            <a:ext cx="576000" cy="99061"/>
+            <a:off x="252000" y="1216800"/>
+            <a:ext cx="576000" cy="91441"/>
           </a:xfrm>
           <a:prstGeom prst="rect">
             <a:avLst/>
@@ -3392,11 +3392,11 @@
           <a:p>
             <a:pPr algn="l">
               <a:lnSpc>
-                <a:spcPts val="754"/>
+                <a:spcPts val="696"/>
               </a:lnSpc>
             </a:pPr>
             <a:r>
-              <a:rPr sz="520" b="1" spc="150">
+              <a:rPr sz="480" b="1" spc="160">
                 <a:solidFill>
                   <a:srgbClr val="6B7280"/>
                 </a:solidFill>
@@ -3416,8 +3416,8 @@
         </p:nvSpPr>
         <p:spPr>
           <a:xfrm>
-            <a:off x="900000" y="1324800"/>
-            <a:ext cx="2088000" cy="142876"/>
+            <a:off x="936000" y="1198800"/>
+            <a:ext cx="2052000" cy="133351"/>
           </a:xfrm>
           <a:prstGeom prst="rect">
             <a:avLst/>
@@ -3432,11 +3432,11 @@
           <a:p>
             <a:pPr algn="l">
               <a:lnSpc>
-                <a:spcPts val="1087"/>
+                <a:spcPts val="1015"/>
               </a:lnSpc>
             </a:pPr>
             <a:r>
-              <a:rPr sz="750" b="0">
+              <a:rPr sz="700" b="0">
                 <a:solidFill>
                   <a:srgbClr val="12151C"/>
                 </a:solidFill>
@@ -3456,13 +3456,13 @@
         </p:nvCxnSpPr>
         <p:spPr>
           <a:xfrm>
-            <a:off x="252000" y="1497600"/>
+            <a:off x="252000" y="1368000"/>
             <a:ext cx="2736000" cy="0"/>
           </a:xfrm>
           <a:prstGeom prst="line">
             <a:avLst/>
           </a:prstGeom>
-          <a:ln w="5760">
+          <a:ln w="3600">
             <a:solidFill>
               <a:srgbClr val="DCDFE4"/>
             </a:solidFill>
@@ -3477,8 +3477,8 @@
         </p:nvSpPr>
         <p:spPr>
           <a:xfrm>
-            <a:off x="252000" y="1569600"/>
-            <a:ext cx="576000" cy="99061"/>
+            <a:off x="252000" y="1447200"/>
+            <a:ext cx="576000" cy="91441"/>
           </a:xfrm>
           <a:prstGeom prst="rect">
             <a:avLst/>
@@ -3493,11 +3493,11 @@
           <a:p>
             <a:pPr algn="l">
               <a:lnSpc>
-                <a:spcPts val="754"/>
+                <a:spcPts val="696"/>
               </a:lnSpc>
             </a:pPr>
             <a:r>
-              <a:rPr sz="520" b="1" spc="150">
+              <a:rPr sz="480" b="1" spc="160">
                 <a:solidFill>
                   <a:srgbClr val="6B7280"/>
                 </a:solidFill>
@@ -3517,8 +3517,8 @@
         </p:nvSpPr>
         <p:spPr>
           <a:xfrm>
-            <a:off x="900000" y="1548000"/>
-            <a:ext cx="2088000" cy="142876"/>
+            <a:off x="936000" y="1429200"/>
+            <a:ext cx="2052000" cy="133351"/>
           </a:xfrm>
           <a:prstGeom prst="rect">
             <a:avLst/>
@@ -3533,11 +3533,11 @@
           <a:p>
             <a:pPr algn="l">
               <a:lnSpc>
-                <a:spcPts val="1087"/>
+                <a:spcPts val="1015"/>
               </a:lnSpc>
             </a:pPr>
             <a:r>
-              <a:rPr sz="750" b="0">
+              <a:rPr sz="700" b="0">
                 <a:solidFill>
                   <a:srgbClr val="12151C"/>
                 </a:solidFill>
@@ -3557,13 +3557,13 @@
         </p:nvCxnSpPr>
         <p:spPr>
           <a:xfrm>
-            <a:off x="252000" y="1720800"/>
+            <a:off x="252000" y="1598400"/>
             <a:ext cx="2736000" cy="0"/>
           </a:xfrm>
           <a:prstGeom prst="line">
             <a:avLst/>
           </a:prstGeom>
-          <a:ln w="5760">
+          <a:ln w="3600">
             <a:solidFill>
               <a:srgbClr val="DCDFE4"/>
             </a:solidFill>
@@ -3604,8 +3604,8 @@
         </p:nvSpPr>
         <p:spPr>
           <a:xfrm>
-            <a:off x="252000" y="324000"/>
-            <a:ext cx="2520000" cy="792000"/>
+            <a:off x="252000" y="252000"/>
+            <a:ext cx="1080000" cy="99061"/>
           </a:xfrm>
           <a:prstGeom prst="rect">
             <a:avLst/>
@@ -3620,18 +3620,18 @@
           <a:p>
             <a:pPr algn="l">
               <a:lnSpc>
-                <a:spcPts val="1884"/>
+                <a:spcPts val="754"/>
               </a:lnSpc>
             </a:pPr>
             <a:r>
-              <a:rPr sz="1300" b="1">
+              <a:rPr sz="520" b="1" spc="240">
                 <a:solidFill>
-                  <a:srgbClr val="12151C"/>
+                  <a:srgbClr val="6B7280"/>
                 </a:solidFill>
                 <a:latin typeface="맑은 고딕"/>
                 <a:ea typeface="맑은 고딕"/>
               </a:rPr>
-              <a:t>당신의 목표에 맞춰 설계합니다</a:t>
+              <a:t>전문 분야</a:t>
             </a:r>
           </a:p>
         </p:txBody>
@@ -3644,8 +3644,8 @@
         </p:nvSpPr>
         <p:spPr>
           <a:xfrm>
-            <a:off x="0" y="1476000"/>
-            <a:ext cx="3240000" cy="324000"/>
+            <a:off x="252000" y="352800"/>
+            <a:ext cx="108000" cy="14400"/>
           </a:xfrm>
           <a:prstGeom prst="rect">
             <a:avLst/>
@@ -3665,16 +3665,37 @@
           </a:p>
         </p:txBody>
       </p:sp>
-      <p:sp>
-        <p:nvSpPr>
-          <p:cNvPr id="4" name="텍스트"/>
+      <p:cxnSp>
+        <p:nvCxnSpPr>
+          <p:cNvPr id="4" name="Connector 3"/>
+          <p:cNvCxnSpPr/>
+          <p:nvPr/>
+        </p:nvCxnSpPr>
+        <p:spPr>
+          <a:xfrm>
+            <a:off x="252000" y="468000"/>
+            <a:ext cx="1512000" cy="0"/>
+          </a:xfrm>
+          <a:prstGeom prst="line">
+            <a:avLst/>
+          </a:prstGeom>
+          <a:ln w="3600">
+            <a:solidFill>
+              <a:srgbClr val="E3E5E9"/>
+            </a:solidFill>
+          </a:ln>
+        </p:spPr>
+      </p:cxnSp>
+      <p:sp>
+        <p:nvSpPr>
+          <p:cNvPr id="5" name="텍스트"/>
           <p:cNvSpPr txBox="1"/>
           <p:nvPr/>
         </p:nvSpPr>
         <p:spPr>
           <a:xfrm>
-            <a:off x="252000" y="1569600"/>
-            <a:ext cx="1872000" cy="142876"/>
+            <a:off x="252000" y="511200"/>
+            <a:ext cx="1260000" cy="133351"/>
           </a:xfrm>
           <a:prstGeom prst="rect">
             <a:avLst/>
@@ -3689,41 +3710,246 @@
           <a:p>
             <a:pPr algn="l">
               <a:lnSpc>
-                <a:spcPts val="1087"/>
+                <a:spcPts val="1015"/>
               </a:lnSpc>
             </a:pPr>
             <a:r>
-              <a:rPr sz="750" b="1" spc="200">
+              <a:rPr sz="700" b="0">
                 <a:solidFill>
-                  <a:srgbClr val="FFFFFF"/>
+                  <a:srgbClr val="12151C"/>
                 </a:solidFill>
                 <a:latin typeface="맑은 고딕"/>
                 <a:ea typeface="맑은 고딕"/>
               </a:rPr>
-              <a:t>소속 · 브랜드</a:t>
-            </a:r>
-          </a:p>
-        </p:txBody>
-      </p:sp>
-      <p:sp>
-        <p:nvSpPr>
-          <p:cNvPr id="5" name="Oval 4"/>
+              <a:t>웹 개발</a:t>
+            </a:r>
+          </a:p>
+        </p:txBody>
+      </p:sp>
+      <p:cxnSp>
+        <p:nvCxnSpPr>
+          <p:cNvPr id="6" name="Connector 5"/>
+          <p:cNvCxnSpPr/>
+          <p:nvPr/>
+        </p:nvCxnSpPr>
+        <p:spPr>
+          <a:xfrm>
+            <a:off x="252000" y="655200"/>
+            <a:ext cx="1512000" cy="0"/>
+          </a:xfrm>
+          <a:prstGeom prst="line">
+            <a:avLst/>
+          </a:prstGeom>
+          <a:ln w="3600">
+            <a:solidFill>
+              <a:srgbClr val="E3E5E9"/>
+            </a:solidFill>
+          </a:ln>
+        </p:spPr>
+      </p:cxnSp>
+      <p:sp>
+        <p:nvSpPr>
+          <p:cNvPr id="7" name="텍스트"/>
+          <p:cNvSpPr txBox="1"/>
+          <p:nvPr/>
+        </p:nvSpPr>
+        <p:spPr>
+          <a:xfrm>
+            <a:off x="252000" y="698400"/>
+            <a:ext cx="1260000" cy="133351"/>
+          </a:xfrm>
+          <a:prstGeom prst="rect">
+            <a:avLst/>
+          </a:prstGeom>
+          <a:noFill/>
+        </p:spPr>
+        <p:txBody>
+          <a:bodyPr wrap="square" lIns="0" rIns="0" tIns="0" bIns="0" anchor="t">
+            <a:spAutoFit/>
+          </a:bodyPr>
+          <a:lstStyle/>
+          <a:p>
+            <a:pPr algn="l">
+              <a:lnSpc>
+                <a:spcPts val="1015"/>
+              </a:lnSpc>
+            </a:pPr>
+            <a:r>
+              <a:rPr sz="700" b="0">
+                <a:solidFill>
+                  <a:srgbClr val="12151C"/>
+                </a:solidFill>
+                <a:latin typeface="맑은 고딕"/>
+                <a:ea typeface="맑은 고딕"/>
+              </a:rPr>
+              <a:t>통역</a:t>
+            </a:r>
+          </a:p>
+        </p:txBody>
+      </p:sp>
+      <p:cxnSp>
+        <p:nvCxnSpPr>
+          <p:cNvPr id="8" name="Connector 7"/>
+          <p:cNvCxnSpPr/>
+          <p:nvPr/>
+        </p:nvCxnSpPr>
+        <p:spPr>
+          <a:xfrm>
+            <a:off x="252000" y="842400"/>
+            <a:ext cx="1512000" cy="0"/>
+          </a:xfrm>
+          <a:prstGeom prst="line">
+            <a:avLst/>
+          </a:prstGeom>
+          <a:ln w="3600">
+            <a:solidFill>
+              <a:srgbClr val="E3E5E9"/>
+            </a:solidFill>
+          </a:ln>
+        </p:spPr>
+      </p:cxnSp>
+      <p:sp>
+        <p:nvSpPr>
+          <p:cNvPr id="9" name="텍스트"/>
+          <p:cNvSpPr txBox="1"/>
+          <p:nvPr/>
+        </p:nvSpPr>
+        <p:spPr>
+          <a:xfrm>
+            <a:off x="252000" y="885600"/>
+            <a:ext cx="1260000" cy="133351"/>
+          </a:xfrm>
+          <a:prstGeom prst="rect">
+            <a:avLst/>
+          </a:prstGeom>
+          <a:noFill/>
+        </p:spPr>
+        <p:txBody>
+          <a:bodyPr wrap="square" lIns="0" rIns="0" tIns="0" bIns="0" anchor="t">
+            <a:spAutoFit/>
+          </a:bodyPr>
+          <a:lstStyle/>
+          <a:p>
+            <a:pPr algn="l">
+              <a:lnSpc>
+                <a:spcPts val="1015"/>
+              </a:lnSpc>
+            </a:pPr>
+            <a:r>
+              <a:rPr sz="700" b="0">
+                <a:solidFill>
+                  <a:srgbClr val="12151C"/>
+                </a:solidFill>
+                <a:latin typeface="맑은 고딕"/>
+                <a:ea typeface="맑은 고딕"/>
+              </a:rPr>
+              <a:t>컨설팅</a:t>
+            </a:r>
+          </a:p>
+        </p:txBody>
+      </p:sp>
+      <p:cxnSp>
+        <p:nvCxnSpPr>
+          <p:cNvPr id="10" name="Connector 9"/>
+          <p:cNvCxnSpPr/>
+          <p:nvPr/>
+        </p:nvCxnSpPr>
+        <p:spPr>
+          <a:xfrm>
+            <a:off x="252000" y="1029600"/>
+            <a:ext cx="1512000" cy="0"/>
+          </a:xfrm>
+          <a:prstGeom prst="line">
+            <a:avLst/>
+          </a:prstGeom>
+          <a:ln w="3600">
+            <a:solidFill>
+              <a:srgbClr val="E3E5E9"/>
+            </a:solidFill>
+          </a:ln>
+        </p:spPr>
+      </p:cxnSp>
+      <p:sp>
+        <p:nvSpPr>
+          <p:cNvPr id="11" name="텍스트"/>
+          <p:cNvSpPr txBox="1"/>
+          <p:nvPr/>
+        </p:nvSpPr>
+        <p:spPr>
+          <a:xfrm>
+            <a:off x="252000" y="1072800"/>
+            <a:ext cx="1260000" cy="133351"/>
+          </a:xfrm>
+          <a:prstGeom prst="rect">
+            <a:avLst/>
+          </a:prstGeom>
+          <a:noFill/>
+        </p:spPr>
+        <p:txBody>
+          <a:bodyPr wrap="square" lIns="0" rIns="0" tIns="0" bIns="0" anchor="t">
+            <a:spAutoFit/>
+          </a:bodyPr>
+          <a:lstStyle/>
+          <a:p>
+            <a:pPr algn="l">
+              <a:lnSpc>
+                <a:spcPts val="1015"/>
+              </a:lnSpc>
+            </a:pPr>
+            <a:r>
+              <a:rPr sz="700" b="0">
+                <a:solidFill>
+                  <a:srgbClr val="12151C"/>
+                </a:solidFill>
+                <a:latin typeface="맑은 고딕"/>
+                <a:ea typeface="맑은 고딕"/>
+              </a:rPr>
+              <a:t>프로젝트 관리</a:t>
+            </a:r>
+          </a:p>
+        </p:txBody>
+      </p:sp>
+      <p:cxnSp>
+        <p:nvCxnSpPr>
+          <p:cNvPr id="12" name="Connector 11"/>
+          <p:cNvCxnSpPr/>
+          <p:nvPr/>
+        </p:nvCxnSpPr>
+        <p:spPr>
+          <a:xfrm>
+            <a:off x="252000" y="1216800"/>
+            <a:ext cx="1512000" cy="0"/>
+          </a:xfrm>
+          <a:prstGeom prst="line">
+            <a:avLst/>
+          </a:prstGeom>
+          <a:ln w="3600">
+            <a:solidFill>
+              <a:srgbClr val="E3E5E9"/>
+            </a:solidFill>
+          </a:ln>
+        </p:spPr>
+      </p:cxnSp>
+      <p:sp>
+        <p:nvSpPr>
+          <p:cNvPr id="13" name="Rectangle 12"/>
           <p:cNvSpPr/>
           <p:nvPr/>
         </p:nvSpPr>
         <p:spPr>
           <a:xfrm>
-            <a:off x="2714400" y="1616400"/>
-            <a:ext cx="43200" cy="43200"/>
-          </a:xfrm>
-          <a:prstGeom prst="ellipse">
+            <a:off x="2196000" y="396000"/>
+            <a:ext cx="720000" cy="720000"/>
+          </a:xfrm>
+          <a:prstGeom prst="rect">
             <a:avLst/>
           </a:prstGeom>
-          <a:solidFill>
-            <a:srgbClr val="FFFFFF"/>
-          </a:solidFill>
-          <a:ln>
-            <a:noFill/>
+          <a:noFill/>
+          <a:ln w="4320">
+            <a:solidFill>
+              <a:srgbClr val="6B7280"/>
+            </a:solidFill>
+            <a:prstDash val="dash"/>
           </a:ln>
         </p:spPr>
         <p:txBody>
@@ -3736,63 +3962,121 @@
       </p:sp>
       <p:sp>
         <p:nvSpPr>
-          <p:cNvPr id="6" name="Oval 5"/>
-          <p:cNvSpPr/>
+          <p:cNvPr id="14" name="텍스트"/>
+          <p:cNvSpPr txBox="1"/>
           <p:nvPr/>
         </p:nvSpPr>
         <p:spPr>
           <a:xfrm>
-            <a:off x="2822400" y="1616400"/>
-            <a:ext cx="43200" cy="43200"/>
-          </a:xfrm>
-          <a:prstGeom prst="ellipse">
+            <a:off x="2196000" y="396000"/>
+            <a:ext cx="720000" cy="720000"/>
+          </a:xfrm>
+          <a:prstGeom prst="rect">
             <a:avLst/>
           </a:prstGeom>
-          <a:solidFill>
-            <a:srgbClr val="FFFFFF">
-              <a:alpha val="50000"/>
-            </a:srgbClr>
-          </a:solidFill>
-          <a:ln>
-            <a:noFill/>
-          </a:ln>
-        </p:spPr>
-        <p:txBody>
-          <a:bodyPr rtlCol="0" anchor="ctr"/>
-          <a:lstStyle/>
-          <a:p>
-            <a:pPr algn="ctr"/>
-          </a:p>
-        </p:txBody>
-      </p:sp>
-      <p:sp>
-        <p:nvSpPr>
-          <p:cNvPr id="7" name="Oval 6"/>
-          <p:cNvSpPr/>
+          <a:noFill/>
+        </p:spPr>
+        <p:txBody>
+          <a:bodyPr wrap="square" lIns="0" rIns="0" tIns="0" bIns="0" anchor="ctr">
+            <a:spAutoFit/>
+          </a:bodyPr>
+          <a:lstStyle/>
+          <a:p>
+            <a:pPr algn="ctr">
+              <a:lnSpc>
+                <a:spcPts val="1305"/>
+              </a:lnSpc>
+            </a:pPr>
+            <a:r>
+              <a:rPr sz="900" b="1">
+                <a:solidFill>
+                  <a:srgbClr val="6B7280"/>
+                </a:solidFill>
+                <a:latin typeface="맑은 고딕"/>
+                <a:ea typeface="맑은 고딕"/>
+              </a:rPr>
+              <a:t>QR</a:t>
+            </a:r>
+          </a:p>
+        </p:txBody>
+      </p:sp>
+      <p:sp>
+        <p:nvSpPr>
+          <p:cNvPr id="15" name="텍스트"/>
+          <p:cNvSpPr txBox="1"/>
           <p:nvPr/>
         </p:nvSpPr>
         <p:spPr>
           <a:xfrm>
-            <a:off x="2930400" y="1616400"/>
-            <a:ext cx="43200" cy="43200"/>
-          </a:xfrm>
-          <a:prstGeom prst="ellipse">
+            <a:off x="2196000" y="1209600"/>
+            <a:ext cx="720000" cy="118111"/>
+          </a:xfrm>
+          <a:prstGeom prst="rect">
             <a:avLst/>
           </a:prstGeom>
-          <a:solidFill>
-            <a:srgbClr val="FFFFFF">
-              <a:alpha val="50000"/>
-            </a:srgbClr>
-          </a:solidFill>
-          <a:ln>
-            <a:noFill/>
-          </a:ln>
-        </p:spPr>
-        <p:txBody>
-          <a:bodyPr rtlCol="0" anchor="ctr"/>
-          <a:lstStyle/>
-          <a:p>
-            <a:pPr algn="ctr"/>
+          <a:noFill/>
+        </p:spPr>
+        <p:txBody>
+          <a:bodyPr wrap="square" lIns="0" rIns="0" tIns="0" bIns="0" anchor="t">
+            <a:spAutoFit/>
+          </a:bodyPr>
+          <a:lstStyle/>
+          <a:p>
+            <a:pPr algn="ctr">
+              <a:lnSpc>
+                <a:spcPts val="899"/>
+              </a:lnSpc>
+            </a:pPr>
+            <a:r>
+              <a:rPr sz="620" b="0">
+                <a:solidFill>
+                  <a:srgbClr val="12151C"/>
+                </a:solidFill>
+                <a:latin typeface="맑은 고딕"/>
+                <a:ea typeface="맑은 고딕"/>
+              </a:rPr>
+              <a:t>@채널아이디</a:t>
+            </a:r>
+          </a:p>
+        </p:txBody>
+      </p:sp>
+      <p:sp>
+        <p:nvSpPr>
+          <p:cNvPr id="16" name="텍스트"/>
+          <p:cNvSpPr txBox="1"/>
+          <p:nvPr/>
+        </p:nvSpPr>
+        <p:spPr>
+          <a:xfrm>
+            <a:off x="2196000" y="1353600"/>
+            <a:ext cx="720000" cy="118111"/>
+          </a:xfrm>
+          <a:prstGeom prst="rect">
+            <a:avLst/>
+          </a:prstGeom>
+          <a:noFill/>
+        </p:spPr>
+        <p:txBody>
+          <a:bodyPr wrap="square" lIns="0" rIns="0" tIns="0" bIns="0" anchor="t">
+            <a:spAutoFit/>
+          </a:bodyPr>
+          <a:lstStyle/>
+          <a:p>
+            <a:pPr algn="ctr">
+              <a:lnSpc>
+                <a:spcPts val="899"/>
+              </a:lnSpc>
+            </a:pPr>
+            <a:r>
+              <a:rPr sz="620" b="0">
+                <a:solidFill>
+                  <a:srgbClr val="6B7280"/>
+                </a:solidFill>
+                <a:latin typeface="맑은 고딕"/>
+                <a:ea typeface="맑은 고딕"/>
+              </a:rPr>
+              <a:t>평일 10:00 – 18:00</a:t>
+            </a:r>
           </a:p>
         </p:txBody>
       </p:sp>
